--- a/Base_proyecto/documentacion/CRS_Presentacion_Final.pptx
+++ b/Base_proyecto/documentacion/CRS_Presentacion_Final.pptx
@@ -117,6 +117,81 @@
     </p:ext>
   </p:extLst>
 </p:presentation>
+</file>
+
+<file path=ppt/changesInfos/changesInfo1.xml><?xml version="1.0" encoding="utf-8"?>
+<pc:chgInfo xmlns:a="http://schemas.openxmlformats.org/drawingml/2006/main" xmlns:r="http://schemas.openxmlformats.org/officeDocument/2006/relationships" xmlns:ac="http://schemas.microsoft.com/office/drawing/2013/main/command" xmlns:pc="http://schemas.microsoft.com/office/powerpoint/2013/main/command">
+  <pc:docChgLst>
+    <pc:chgData name="Liliana Gonzalez" userId="d8cf2cf8046bb5ba" providerId="LiveId" clId="{0305A978-7101-49F6-B089-C2BFB106AD80}"/>
+    <pc:docChg chg="modSld">
+      <pc:chgData name="Liliana Gonzalez" userId="d8cf2cf8046bb5ba" providerId="LiveId" clId="{0305A978-7101-49F6-B089-C2BFB106AD80}" dt="2026-03-18T02:57:43.968" v="28" actId="20577"/>
+      <pc:docMkLst>
+        <pc:docMk/>
+      </pc:docMkLst>
+      <pc:sldChg chg="modSp mod">
+        <pc:chgData name="Liliana Gonzalez" userId="d8cf2cf8046bb5ba" providerId="LiveId" clId="{0305A978-7101-49F6-B089-C2BFB106AD80}" dt="2026-03-18T02:57:43.968" v="28" actId="20577"/>
+        <pc:sldMkLst>
+          <pc:docMk/>
+          <pc:sldMk cId="0" sldId="256"/>
+        </pc:sldMkLst>
+        <pc:spChg chg="mod">
+          <ac:chgData name="Liliana Gonzalez" userId="d8cf2cf8046bb5ba" providerId="LiveId" clId="{0305A978-7101-49F6-B089-C2BFB106AD80}" dt="2026-03-18T02:50:04.175" v="3" actId="20577"/>
+          <ac:spMkLst>
+            <pc:docMk/>
+            <pc:sldMk cId="0" sldId="256"/>
+            <ac:spMk id="5" creationId="{00000000-0000-0000-0000-000000000000}"/>
+          </ac:spMkLst>
+        </pc:spChg>
+        <pc:spChg chg="mod">
+          <ac:chgData name="Liliana Gonzalez" userId="d8cf2cf8046bb5ba" providerId="LiveId" clId="{0305A978-7101-49F6-B089-C2BFB106AD80}" dt="2026-03-18T02:57:43.968" v="28" actId="20577"/>
+          <ac:spMkLst>
+            <pc:docMk/>
+            <pc:sldMk cId="0" sldId="256"/>
+            <ac:spMk id="12" creationId="{00000000-0000-0000-0000-000000000000}"/>
+          </ac:spMkLst>
+        </pc:spChg>
+      </pc:sldChg>
+      <pc:sldChg chg="modSp mod">
+        <pc:chgData name="Liliana Gonzalez" userId="d8cf2cf8046bb5ba" providerId="LiveId" clId="{0305A978-7101-49F6-B089-C2BFB106AD80}" dt="2026-03-18T02:57:37.935" v="26" actId="20577"/>
+        <pc:sldMkLst>
+          <pc:docMk/>
+          <pc:sldMk cId="0" sldId="258"/>
+        </pc:sldMkLst>
+        <pc:spChg chg="mod">
+          <ac:chgData name="Liliana Gonzalez" userId="d8cf2cf8046bb5ba" providerId="LiveId" clId="{0305A978-7101-49F6-B089-C2BFB106AD80}" dt="2026-03-18T02:57:37.935" v="26" actId="20577"/>
+          <ac:spMkLst>
+            <pc:docMk/>
+            <pc:sldMk cId="0" sldId="258"/>
+            <ac:spMk id="11" creationId="{00000000-0000-0000-0000-000000000000}"/>
+          </ac:spMkLst>
+        </pc:spChg>
+      </pc:sldChg>
+      <pc:sldChg chg="modSp mod">
+        <pc:chgData name="Liliana Gonzalez" userId="d8cf2cf8046bb5ba" providerId="LiveId" clId="{0305A978-7101-49F6-B089-C2BFB106AD80}" dt="2026-03-18T02:57:10.922" v="24" actId="20577"/>
+        <pc:sldMkLst>
+          <pc:docMk/>
+          <pc:sldMk cId="0" sldId="263"/>
+        </pc:sldMkLst>
+        <pc:spChg chg="mod">
+          <ac:chgData name="Liliana Gonzalez" userId="d8cf2cf8046bb5ba" providerId="LiveId" clId="{0305A978-7101-49F6-B089-C2BFB106AD80}" dt="2026-03-18T02:57:10.922" v="24" actId="20577"/>
+          <ac:spMkLst>
+            <pc:docMk/>
+            <pc:sldMk cId="0" sldId="263"/>
+            <ac:spMk id="4" creationId="{00000000-0000-0000-0000-000000000000}"/>
+          </ac:spMkLst>
+        </pc:spChg>
+        <pc:spChg chg="mod">
+          <ac:chgData name="Liliana Gonzalez" userId="d8cf2cf8046bb5ba" providerId="LiveId" clId="{0305A978-7101-49F6-B089-C2BFB106AD80}" dt="2026-03-18T02:56:46.751" v="13" actId="20577"/>
+          <ac:spMkLst>
+            <pc:docMk/>
+            <pc:sldMk cId="0" sldId="263"/>
+            <ac:spMk id="11" creationId="{00000000-0000-0000-0000-000000000000}"/>
+          </ac:spMkLst>
+        </pc:spChg>
+      </pc:sldChg>
+    </pc:docChg>
+  </pc:docChgLst>
+</pc:chgInfo>
 </file>
 
 <file path=ppt/notesMasters/notesMaster1.xml><?xml version="1.0" encoding="utf-8"?>
@@ -1374,35 +1449,7 @@
                 <a:ea typeface="Calibri" pitchFamily="34" charset="-122"/>
                 <a:cs typeface="Calibri" pitchFamily="34" charset="-120"/>
               </a:rPr>
-              <a:t>SENA — Centro de Gestión</a:t>
-            </a:r>
-            <a:endParaRPr lang="en-US" sz="1100" dirty="0"/>
-          </a:p>
-          <a:p>
-            <a:pPr marL="0" indent="0" algn="ctr">
-              <a:buNone/>
-            </a:pPr>
-            <a:r>
-              <a:rPr lang="en-US" sz="1100" b="1" dirty="0" err="1">
-                <a:solidFill>
-                  <a:srgbClr val="1A2B45"/>
-                </a:solidFill>
-                <a:latin typeface="Calibri" pitchFamily="34" charset="0"/>
-                <a:ea typeface="Calibri" pitchFamily="34" charset="-122"/>
-                <a:cs typeface="Calibri" pitchFamily="34" charset="-120"/>
-              </a:rPr>
-              <a:t>Administrativa</a:t>
-            </a:r>
-            <a:r>
-              <a:rPr lang="en-US" sz="1100" b="1" dirty="0">
-                <a:solidFill>
-                  <a:srgbClr val="1A2B45"/>
-                </a:solidFill>
-                <a:latin typeface="Calibri" pitchFamily="34" charset="0"/>
-                <a:ea typeface="Calibri" pitchFamily="34" charset="-122"/>
-                <a:cs typeface="Calibri" pitchFamily="34" charset="-120"/>
-              </a:rPr>
-              <a:t> -HSGS-</a:t>
+              <a:t>SENA — CIDM</a:t>
             </a:r>
             <a:endParaRPr lang="en-US" sz="1100" dirty="0"/>
           </a:p>
@@ -1689,7 +1736,18 @@
                 <a:ea typeface="Calibri" pitchFamily="34" charset="-122"/>
                 <a:cs typeface="Calibri" pitchFamily="34" charset="-120"/>
               </a:rPr>
-              <a:t>C.R.S v2.0</a:t>
+              <a:t>C.R.</a:t>
+            </a:r>
+            <a:r>
+              <a:rPr lang="en-US" sz="1400">
+                <a:solidFill>
+                  <a:srgbClr val="8A95A3"/>
+                </a:solidFill>
+                <a:latin typeface="Calibri" pitchFamily="34" charset="0"/>
+                <a:ea typeface="Calibri" pitchFamily="34" charset="-122"/>
+                <a:cs typeface="Calibri" pitchFamily="34" charset="-120"/>
+              </a:rPr>
+              <a:t>S v2.1</a:t>
             </a:r>
             <a:endParaRPr lang="en-US" sz="1400" dirty="0"/>
           </a:p>
@@ -3175,7 +3233,7 @@
                 <a:ea typeface="Calibri" pitchFamily="34" charset="-122"/>
                 <a:cs typeface="Calibri" pitchFamily="34" charset="-120"/>
               </a:rPr>
-              <a:t>SENA HSGS · Python Desktop · v2.0</a:t>
+              <a:t>SENA CIDM · Python Desktop · v2.1</a:t>
             </a:r>
             <a:endParaRPr lang="en-US" sz="1000" dirty="0"/>
           </a:p>
@@ -9666,7 +9724,7 @@
                 <a:ea typeface="Calibri" pitchFamily="34" charset="-122"/>
                 <a:cs typeface="Calibri" pitchFamily="34" charset="-120"/>
               </a:rPr>
-              <a:t>CRS -HSGS- SENA</a:t>
+              <a:t>CRS -HSGS- SENA CIDM</a:t>
             </a:r>
             <a:endParaRPr lang="en-US" sz="1400" dirty="0"/>
           </a:p>
@@ -9993,7 +10051,7 @@
                 <a:ea typeface="Calibri" pitchFamily="34" charset="-122"/>
                 <a:cs typeface="Calibri" pitchFamily="34" charset="-120"/>
               </a:rPr>
-              <a:t>C.R.S v2.0 — Estado: Listo para producción</a:t>
+              <a:t>C.R.S v2.1 — Estado: Listo para producción</a:t>
             </a:r>
             <a:endParaRPr lang="en-US" sz="1150" dirty="0"/>
           </a:p>

--- a/Base_proyecto/documentacion/CRS_Presentacion_Final.pptx
+++ b/Base_proyecto/documentacion/CRS_Presentacion_Final.pptx
@@ -124,7 +124,7 @@
   <pc:docChgLst>
     <pc:chgData name="Liliana Gonzalez" userId="d8cf2cf8046bb5ba" providerId="LiveId" clId="{0305A978-7101-49F6-B089-C2BFB106AD80}"/>
     <pc:docChg chg="modSld">
-      <pc:chgData name="Liliana Gonzalez" userId="d8cf2cf8046bb5ba" providerId="LiveId" clId="{0305A978-7101-49F6-B089-C2BFB106AD80}" dt="2026-03-18T02:57:43.968" v="28" actId="20577"/>
+      <pc:chgData name="Liliana Gonzalez" userId="d8cf2cf8046bb5ba" providerId="LiveId" clId="{0305A978-7101-49F6-B089-C2BFB106AD80}" dt="2026-03-18T15:14:48.980" v="30" actId="20577"/>
       <pc:docMkLst>
         <pc:docMk/>
       </pc:docMkLst>
@@ -163,6 +163,21 @@
             <pc:docMk/>
             <pc:sldMk cId="0" sldId="258"/>
             <ac:spMk id="11" creationId="{00000000-0000-0000-0000-000000000000}"/>
+          </ac:spMkLst>
+        </pc:spChg>
+      </pc:sldChg>
+      <pc:sldChg chg="modSp mod">
+        <pc:chgData name="Liliana Gonzalez" userId="d8cf2cf8046bb5ba" providerId="LiveId" clId="{0305A978-7101-49F6-B089-C2BFB106AD80}" dt="2026-03-18T15:14:48.980" v="30" actId="20577"/>
+        <pc:sldMkLst>
+          <pc:docMk/>
+          <pc:sldMk cId="0" sldId="262"/>
+        </pc:sldMkLst>
+        <pc:spChg chg="mod">
+          <ac:chgData name="Liliana Gonzalez" userId="d8cf2cf8046bb5ba" providerId="LiveId" clId="{0305A978-7101-49F6-B089-C2BFB106AD80}" dt="2026-03-18T15:14:48.980" v="30" actId="20577"/>
+          <ac:spMkLst>
+            <pc:docMk/>
+            <pc:sldMk cId="0" sldId="262"/>
+            <ac:spMk id="36" creationId="{00000000-0000-0000-0000-000000000000}"/>
           </ac:spMkLst>
         </pc:spChg>
       </pc:sldChg>
@@ -9596,7 +9611,29 @@
                 <a:ea typeface="Calibri" pitchFamily="34" charset="-122"/>
                 <a:cs typeface="Calibri" pitchFamily="34" charset="-120"/>
               </a:rPr>
-              <a:t>C.R.S v2.0 está en estado de producción, con instalador y documentación completa.</a:t>
+              <a:t>C.R.</a:t>
+            </a:r>
+            <a:r>
+              <a:rPr lang="en-US" sz="1000">
+                <a:solidFill>
+                  <a:srgbClr val="4A5568"/>
+                </a:solidFill>
+                <a:latin typeface="Calibri" pitchFamily="34" charset="0"/>
+                <a:ea typeface="Calibri" pitchFamily="34" charset="-122"/>
+                <a:cs typeface="Calibri" pitchFamily="34" charset="-120"/>
+              </a:rPr>
+              <a:t>S v2.1 </a:t>
+            </a:r>
+            <a:r>
+              <a:rPr lang="en-US" sz="1000" dirty="0">
+                <a:solidFill>
+                  <a:srgbClr val="4A5568"/>
+                </a:solidFill>
+                <a:latin typeface="Calibri" pitchFamily="34" charset="0"/>
+                <a:ea typeface="Calibri" pitchFamily="34" charset="-122"/>
+                <a:cs typeface="Calibri" pitchFamily="34" charset="-120"/>
+              </a:rPr>
+              <a:t>está en estado de producción, con instalador y documentación completa.</a:t>
             </a:r>
             <a:endParaRPr lang="en-US" sz="1000" dirty="0"/>
           </a:p>
